--- a/deck/Building_OTHO_ProductionX.pptx
+++ b/deck/Building_OTHO_ProductionX.pptx
@@ -4174,7 +4174,7 @@
               <a:buNone/>
             </a:pPr>
             <a:r>
-              <a:rPr lang="en-US" sz="1500" b="1" dirty="0">
+              <a:rPr lang="en-US" sz="1350" b="1" dirty="0">
                 <a:solidFill>
                   <a:srgbClr val="FFFFFF"/>
                 </a:solidFill>
@@ -4184,7 +4184,7 @@
               </a:rPr>
               <a:t>Neopolis, Kokapet</a:t>
             </a:r>
-            <a:endParaRPr lang="en-US" sz="1500" dirty="0"/>
+            <a:endParaRPr lang="en-US" sz="1350" dirty="0"/>
           </a:p>
         </p:txBody>
       </p:sp>
@@ -4252,7 +4252,7 @@
               <a:buNone/>
             </a:pPr>
             <a:r>
-              <a:rPr lang="en-US" sz="1500" b="1" dirty="0">
+              <a:rPr lang="en-US" sz="1350" b="1" dirty="0">
                 <a:solidFill>
                   <a:srgbClr val="FFFFFF"/>
                 </a:solidFill>
@@ -4262,7 +4262,7 @@
               </a:rPr>
               <a:t>90 days</a:t>
             </a:r>
-            <a:endParaRPr lang="en-US" sz="1500" dirty="0"/>
+            <a:endParaRPr lang="en-US" sz="1350" dirty="0"/>
           </a:p>
         </p:txBody>
       </p:sp>
@@ -4330,7 +4330,7 @@
               <a:buNone/>
             </a:pPr>
             <a:r>
-              <a:rPr lang="en-US" sz="1500" b="1" dirty="0">
+              <a:rPr lang="en-US" sz="1350" b="1" dirty="0">
                 <a:solidFill>
                   <a:srgbClr val="FFFFFF"/>
                 </a:solidFill>
@@ -4340,7 +4340,7 @@
               </a:rPr>
               <a:t>CarWale, for property</a:t>
             </a:r>
-            <a:endParaRPr lang="en-US" sz="1500" dirty="0"/>
+            <a:endParaRPr lang="en-US" sz="1350" dirty="0"/>
           </a:p>
         </p:txBody>
       </p:sp>
@@ -4408,7 +4408,7 @@
               <a:buNone/>
             </a:pPr>
             <a:r>
-              <a:rPr lang="en-US" sz="1500" b="1" dirty="0">
+              <a:rPr lang="en-US" sz="1350" b="1" dirty="0">
                 <a:solidFill>
                   <a:srgbClr val="FFFFFF"/>
                 </a:solidFill>
@@ -4416,9 +4416,9 @@
                 <a:ea typeface="Cambria" pitchFamily="34" charset="-122"/>
                 <a:cs typeface="Cambria" pitchFamily="34" charset="-120"/>
               </a:rPr>
-              <a:t>Hyderabad → India → global</a:t>
-            </a:r>
-            <a:endParaRPr lang="en-US" sz="1500" dirty="0"/>
+              <a:t>Hyderabad, India, global</a:t>
+            </a:r>
+            <a:endParaRPr lang="en-US" sz="1350" dirty="0"/>
           </a:p>
         </p:txBody>
       </p:sp>
